--- a/比賽簡報_升級版.pptx
+++ b/比賽簡報_升級版.pptx
@@ -11,12 +11,15 @@
     <p:sldId id="259" r:id="rId5"/>
     <p:sldId id="260" r:id="rId6"/>
     <p:sldId id="261" r:id="rId7"/>
+    <p:sldId id="275" r:id="rId25"/>
     <p:sldId id="262" r:id="rId8"/>
     <p:sldId id="263" r:id="rId9"/>
     <p:sldId id="264" r:id="rId10"/>
+    <p:sldId id="274" r:id="rId24"/>
     <p:sldId id="265" r:id="rId11"/>
     <p:sldId id="266" r:id="rId12"/>
     <p:sldId id="267" r:id="rId13"/>
+    <p:sldId id="276" r:id="rId26"/>
     <p:sldId id="268" r:id="rId14"/>
     <p:sldId id="269" r:id="rId15"/>
     <p:sldId id="270" r:id="rId16"/>
@@ -319,7 +322,7 @@
           <a:p>
             <a:fld id="{5BCAD085-E8A6-8845-BD4E-CB4CCA059FC4}" type="datetimeFigureOut">
               <a:rPr lang="en-US" smtClean="0"/>
-              <a:t>7/22/2026</a:t>
+              <a:t>7/29/2026</a:t>
             </a:fld>
             <a:endParaRPr lang="en-US"/>
           </a:p>
@@ -487,7 +490,7 @@
           <a:p>
             <a:fld id="{5BCAD085-E8A6-8845-BD4E-CB4CCA059FC4}" type="datetimeFigureOut">
               <a:rPr lang="en-US" smtClean="0"/>
-              <a:t>7/22/2026</a:t>
+              <a:t>7/29/2026</a:t>
             </a:fld>
             <a:endParaRPr lang="en-US"/>
           </a:p>
@@ -665,7 +668,7 @@
           <a:p>
             <a:fld id="{5BCAD085-E8A6-8845-BD4E-CB4CCA059FC4}" type="datetimeFigureOut">
               <a:rPr lang="en-US" smtClean="0"/>
-              <a:t>7/22/2026</a:t>
+              <a:t>7/29/2026</a:t>
             </a:fld>
             <a:endParaRPr lang="en-US"/>
           </a:p>
@@ -833,7 +836,7 @@
           <a:p>
             <a:fld id="{5BCAD085-E8A6-8845-BD4E-CB4CCA059FC4}" type="datetimeFigureOut">
               <a:rPr lang="en-US" smtClean="0"/>
-              <a:t>7/22/2026</a:t>
+              <a:t>7/29/2026</a:t>
             </a:fld>
             <a:endParaRPr lang="en-US"/>
           </a:p>
@@ -1078,7 +1081,7 @@
           <a:p>
             <a:fld id="{5BCAD085-E8A6-8845-BD4E-CB4CCA059FC4}" type="datetimeFigureOut">
               <a:rPr lang="en-US" smtClean="0"/>
-              <a:t>7/22/2026</a:t>
+              <a:t>7/29/2026</a:t>
             </a:fld>
             <a:endParaRPr lang="en-US"/>
           </a:p>
@@ -1363,7 +1366,7 @@
           <a:p>
             <a:fld id="{5BCAD085-E8A6-8845-BD4E-CB4CCA059FC4}" type="datetimeFigureOut">
               <a:rPr lang="en-US" smtClean="0"/>
-              <a:t>7/22/2026</a:t>
+              <a:t>7/29/2026</a:t>
             </a:fld>
             <a:endParaRPr lang="en-US"/>
           </a:p>
@@ -1782,7 +1785,7 @@
           <a:p>
             <a:fld id="{5BCAD085-E8A6-8845-BD4E-CB4CCA059FC4}" type="datetimeFigureOut">
               <a:rPr lang="en-US" smtClean="0"/>
-              <a:t>7/22/2026</a:t>
+              <a:t>7/29/2026</a:t>
             </a:fld>
             <a:endParaRPr lang="en-US"/>
           </a:p>
@@ -1899,7 +1902,7 @@
           <a:p>
             <a:fld id="{5BCAD085-E8A6-8845-BD4E-CB4CCA059FC4}" type="datetimeFigureOut">
               <a:rPr lang="en-US" smtClean="0"/>
-              <a:t>7/22/2026</a:t>
+              <a:t>7/29/2026</a:t>
             </a:fld>
             <a:endParaRPr lang="en-US"/>
           </a:p>
@@ -1994,7 +1997,7 @@
           <a:p>
             <a:fld id="{5BCAD085-E8A6-8845-BD4E-CB4CCA059FC4}" type="datetimeFigureOut">
               <a:rPr lang="en-US" smtClean="0"/>
-              <a:t>7/22/2026</a:t>
+              <a:t>7/29/2026</a:t>
             </a:fld>
             <a:endParaRPr lang="en-US"/>
           </a:p>
@@ -2269,7 +2272,7 @@
           <a:p>
             <a:fld id="{5BCAD085-E8A6-8845-BD4E-CB4CCA059FC4}" type="datetimeFigureOut">
               <a:rPr lang="en-US" smtClean="0"/>
-              <a:t>7/22/2026</a:t>
+              <a:t>7/29/2026</a:t>
             </a:fld>
             <a:endParaRPr lang="en-US"/>
           </a:p>
@@ -2521,7 +2524,7 @@
           <a:p>
             <a:fld id="{5BCAD085-E8A6-8845-BD4E-CB4CCA059FC4}" type="datetimeFigureOut">
               <a:rPr lang="en-US" smtClean="0"/>
-              <a:t>7/22/2026</a:t>
+              <a:t>7/29/2026</a:t>
             </a:fld>
             <a:endParaRPr lang="en-US"/>
           </a:p>
@@ -2732,7 +2735,7 @@
           <a:p>
             <a:fld id="{5BCAD085-E8A6-8845-BD4E-CB4CCA059FC4}" type="datetimeFigureOut">
               <a:rPr lang="en-US" smtClean="0"/>
-              <a:t>7/22/2026</a:t>
+              <a:t>7/29/2026</a:t>
             </a:fld>
             <a:endParaRPr lang="en-US"/>
           </a:p>
@@ -3935,6 +3938,27 @@
               </a:rPr>
               <a:t>●  累計防呆　跨季不亂比；平台拿全年比首季會被攔下標示</a:t>
             </a:r>
+          </a:p>
+          <a:p>
+            <a:pPr>
+              <a:lnSpc>
+                <a:spcPct val="115000"/>
+              </a:lnSpc>
+              <a:spcAft>
+                <a:spcPts val="1200"/>
+              </a:spcAft>
+            </a:pPr>
+            <a:r>
+              <a:rPr sz="1300" b="1">
+                <a:solidFill>
+                  <a:srgbClr val="E8654E"/>
+                </a:solidFill>
+                <a:latin typeface="Microsoft JhengHei"/>
+                <a:ea typeface="Microsoft JhengHei"/>
+                <a:cs typeface="Microsoft JhengHei"/>
+              </a:rPr>
+              <a:t>●  </a:t>
+            </a:r>
             <a:r>
               <a:rPr sz="1500" b="1">
                 <a:solidFill>
@@ -3944,7 +3968,7 @@
                 <a:ea typeface="Microsoft JhengHei"/>
                 <a:cs typeface="Microsoft JhengHei"/>
               </a:rPr>
-              <a:t/>
+              <a:t>變化率　</a:t>
             </a:r>
             <a:r>
               <a:rPr sz="1500">
@@ -3955,7 +3979,7 @@
                 <a:ea typeface="Microsoft JhengHei"/>
                 <a:cs typeface="Microsoft JhengHei"/>
               </a:rPr>
-              <a:t/>
+              <a:t>QoQ／YoY 自動算，台灣慣例上紅下綠</a:t>
             </a:r>
           </a:p>
           <a:p>
@@ -3976,72 +4000,7 @@
                 <a:ea typeface="Microsoft JhengHei"/>
                 <a:cs typeface="Microsoft JhengHei"/>
               </a:rPr>
-              <a:t>●  </a:t>
-            </a:r>
-            <a:r>
-              <a:rPr sz="1500" b="1">
-                <a:solidFill>
-                  <a:srgbClr val="1E3A5F"/>
-                </a:solidFill>
-                <a:latin typeface="Microsoft JhengHei"/>
-                <a:ea typeface="Microsoft JhengHei"/>
-                <a:cs typeface="Microsoft JhengHei"/>
-              </a:rPr>
-              <a:t>變化率　</a:t>
-            </a:r>
-            <a:r>
-              <a:rPr sz="1500">
-                <a:solidFill>
-                  <a:srgbClr val="434343"/>
-                </a:solidFill>
-                <a:latin typeface="Microsoft JhengHei"/>
-                <a:ea typeface="Microsoft JhengHei"/>
-                <a:cs typeface="Microsoft JhengHei"/>
-              </a:rPr>
-              <a:t>QoQ／YoY 自動算，台灣慣例上紅下綠</a:t>
-            </a:r>
-          </a:p>
-          <a:p>
-            <a:pPr>
-              <a:lnSpc>
-                <a:spcPct val="115000"/>
-              </a:lnSpc>
-              <a:spcAft>
-                <a:spcPts val="1200"/>
-              </a:spcAft>
-            </a:pPr>
-            <a:r>
-              <a:rPr sz="1300" b="1">
-                <a:solidFill>
-                  <a:srgbClr val="E8654E"/>
-                </a:solidFill>
-                <a:latin typeface="Microsoft JhengHei"/>
-                <a:ea typeface="Microsoft JhengHei"/>
-                <a:cs typeface="Microsoft JhengHei"/>
-              </a:rPr>
               <a:t>●  誠實揭露　驗過幾筆、哪幾筆本地沒有，畫面上分得清楚</a:t>
-            </a:r>
-            <a:r>
-              <a:rPr sz="1500" b="1">
-                <a:solidFill>
-                  <a:srgbClr val="1E3A5F"/>
-                </a:solidFill>
-                <a:latin typeface="Microsoft JhengHei"/>
-                <a:ea typeface="Microsoft JhengHei"/>
-                <a:cs typeface="Microsoft JhengHei"/>
-              </a:rPr>
-              <a:t/>
-            </a:r>
-            <a:r>
-              <a:rPr sz="1500">
-                <a:solidFill>
-                  <a:srgbClr val="434343"/>
-                </a:solidFill>
-                <a:latin typeface="Microsoft JhengHei"/>
-                <a:ea typeface="Microsoft JhengHei"/>
-                <a:cs typeface="Microsoft JhengHei"/>
-              </a:rPr>
-              <a:t/>
             </a:r>
           </a:p>
         </p:txBody>
@@ -5595,7 +5554,7 @@
                 <a:ea typeface="Microsoft JhengHei"/>
                 <a:cs typeface="Microsoft JhengHei"/>
               </a:rPr>
-              <a:t>附出處可回溯；攔下 10 倍換算錯與累計值跨季亂比。</a:t>
+              <a:t>附出處可回溯；六道防護攔下換算錯、跨期亂比、引用別期。</a:t>
             </a:r>
           </a:p>
         </p:txBody>
@@ -7417,6 +7376,27 @@
                 <a:ea typeface="Microsoft JhengHei"/>
                 <a:cs typeface="Microsoft JhengHei"/>
               </a:rPr>
+              <a:t>●  六道防護　數字不符／引用別期／比較無效／未驗證，四色提示分嚴重度</a:t>
+            </a:r>
+          </a:p>
+          <a:p>
+            <a:pPr>
+              <a:lnSpc>
+                <a:spcPct val="115000"/>
+              </a:lnSpc>
+              <a:spcAft>
+                <a:spcPts val="1300"/>
+              </a:spcAft>
+            </a:pPr>
+            <a:r>
+              <a:rPr sz="1300" b="1">
+                <a:solidFill>
+                  <a:srgbClr val="E8654E"/>
+                </a:solidFill>
+                <a:latin typeface="Microsoft JhengHei"/>
+                <a:ea typeface="Microsoft JhengHei"/>
+                <a:cs typeface="Microsoft JhengHei"/>
+              </a:rPr>
               <a:t>●  </a:t>
             </a:r>
             <a:r>
@@ -7428,7 +7408,7 @@
                 <a:ea typeface="Microsoft JhengHei"/>
                 <a:cs typeface="Microsoft JhengHei"/>
               </a:rPr>
-              <a:t>交叉驗證　</a:t>
+              <a:t>Vector RAG 補強　</a:t>
             </a:r>
             <a:r>
               <a:rPr sz="1500">
@@ -7439,7 +7419,7 @@
                 <a:ea typeface="Microsoft JhengHei"/>
                 <a:cs typeface="Microsoft JhengHei"/>
               </a:rPr>
-              <a:t>EAP 數字與本地不符自動標紅、可一鍵取正解</a:t>
+              <a:t>EAP 查無資料時，改用本地逐字稿檢索再交由 EAP 生成</a:t>
             </a:r>
           </a:p>
           <a:p>
@@ -7460,72 +7440,7 @@
                 <a:ea typeface="Microsoft JhengHei"/>
                 <a:cs typeface="Microsoft JhengHei"/>
               </a:rPr>
-              <a:t>●  </a:t>
-            </a:r>
-            <a:r>
-              <a:rPr sz="1500" b="1">
-                <a:solidFill>
-                  <a:srgbClr val="1E3A5F"/>
-                </a:solidFill>
-                <a:latin typeface="Microsoft JhengHei"/>
-                <a:ea typeface="Microsoft JhengHei"/>
-                <a:cs typeface="Microsoft JhengHei"/>
-              </a:rPr>
-              <a:t>Vector RAG 補強　</a:t>
-            </a:r>
-            <a:r>
-              <a:rPr sz="1500">
-                <a:solidFill>
-                  <a:srgbClr val="434343"/>
-                </a:solidFill>
-                <a:latin typeface="Microsoft JhengHei"/>
-                <a:ea typeface="Microsoft JhengHei"/>
-                <a:cs typeface="Microsoft JhengHei"/>
-              </a:rPr>
-              <a:t>EAP 查無資料時，改用本地逐字稿檢索再交由 EAP 生成</a:t>
-            </a:r>
-          </a:p>
-          <a:p>
-            <a:pPr>
-              <a:lnSpc>
-                <a:spcPct val="115000"/>
-              </a:lnSpc>
-              <a:spcAft>
-                <a:spcPts val="1300"/>
-              </a:spcAft>
-            </a:pPr>
-            <a:r>
-              <a:rPr sz="1300" b="1">
-                <a:solidFill>
-                  <a:srgbClr val="E8654E"/>
-                </a:solidFill>
-                <a:latin typeface="Microsoft JhengHei"/>
-                <a:ea typeface="Microsoft JhengHei"/>
-                <a:cs typeface="Microsoft JhengHei"/>
-              </a:rPr>
-              <a:t>●  </a:t>
-            </a:r>
-            <a:r>
-              <a:rPr sz="1500" b="1">
-                <a:solidFill>
-                  <a:srgbClr val="1E3A5F"/>
-                </a:solidFill>
-                <a:latin typeface="Microsoft JhengHei"/>
-                <a:ea typeface="Microsoft JhengHei"/>
-                <a:cs typeface="Microsoft JhengHei"/>
-              </a:rPr>
-              <a:t>Gemini 輔助　</a:t>
-            </a:r>
-            <a:r>
-              <a:rPr sz="1500">
-                <a:solidFill>
-                  <a:srgbClr val="434343"/>
-                </a:solidFill>
-                <a:latin typeface="Microsoft JhengHei"/>
-                <a:ea typeface="Microsoft JhengHei"/>
-                <a:cs typeface="Microsoft JhengHei"/>
-              </a:rPr>
-              <a:t>備援 LLM ＋ 一鍵匯出 Word</a:t>
+              <a:t>●  資料管線　Gemini VLM／STT 供料，本地驗證把關，一鍵匯出 Word</a:t>
             </a:r>
           </a:p>
         </p:txBody>
@@ -9791,7 +9706,7 @@
               </a:spcAft>
             </a:pPr>
             <a:r>
-              <a:rPr sz="1700" b="1" dirty="0" err="1">
+              <a:rPr sz="1700" b="1" dirty="0">
                 <a:solidFill>
                   <a:srgbClr val="E8654E"/>
                 </a:solidFill>
@@ -9800,6 +9715,17 @@
                 <a:cs typeface="Microsoft JhengHei"/>
               </a:rPr>
               <a:t>使用者角色</a:t>
+            </a:r>
+            <a:r>
+              <a:rPr lang="en-US" sz="1700" b="1" dirty="0">
+                <a:solidFill>
+                  <a:srgbClr val="E8654E"/>
+                </a:solidFill>
+                <a:latin typeface="Microsoft JhengHei"/>
+                <a:ea typeface="Microsoft JhengHei"/>
+                <a:cs typeface="Microsoft JhengHei"/>
+              </a:rPr>
+              <a:t>B2B</a:t>
             </a:r>
             <a:endParaRPr sz="1700" b="1" dirty="0">
               <a:solidFill>
@@ -11133,6 +11059,481 @@
 </p:sld>
 </file>
 
+<file path=ppt/slides/slide19.xml><?xml version="1.0" encoding="utf-8"?>
+<p:sld xmlns:a="http://schemas.openxmlformats.org/drawingml/2006/main" xmlns:p="http://schemas.openxmlformats.org/presentationml/2006/main" xmlns:r="http://schemas.openxmlformats.org/officeDocument/2006/relationships">
+  <p:cSld>
+    <p:spTree>
+      <p:nvGrpSpPr>
+        <p:cNvPr id="1" name=""/>
+        <p:cNvGrpSpPr/>
+        <p:nvPr/>
+      </p:nvGrpSpPr>
+      <p:grpSpPr/>
+      <p:sp>
+        <p:nvSpPr>
+          <p:cNvPr id="2" name="TextBox 1"/>
+          <p:cNvSpPr txBox="1"/>
+          <p:nvPr/>
+        </p:nvSpPr>
+        <p:spPr>
+          <a:xfrm>
+            <a:off x="640080" y="457200"/>
+            <a:ext cx="10058400" cy="365760"/>
+          </a:xfrm>
+          <a:prstGeom prst="rect">
+            <a:avLst/>
+          </a:prstGeom>
+          <a:noFill/>
+        </p:spPr>
+        <p:txBody>
+          <a:bodyPr wrap="square" lIns="0" rIns="0" tIns="0" bIns="0">
+            <a:spAutoFit/>
+          </a:bodyPr>
+          <a:lstStyle/>
+          <a:p>
+            <a:pPr algn="l"/>
+            <a:r>
+              <a:rPr sz="1350" b="1">
+                <a:solidFill>
+                  <a:srgbClr val="E8654E"/>
+                </a:solidFill>
+                <a:latin typeface="Noto Sans TC"/>
+              </a:rPr>
+              <a:t>CONTEXT ENGINEERING · 平台端設定</a:t>
+            </a:r>
+          </a:p>
+        </p:txBody>
+      </p:sp>
+      <p:sp>
+        <p:nvSpPr>
+          <p:cNvPr id="3" name="TextBox 2"/>
+          <p:cNvSpPr txBox="1"/>
+          <p:nvPr/>
+        </p:nvSpPr>
+        <p:spPr>
+          <a:xfrm>
+            <a:off x="640080" y="804672"/>
+            <a:ext cx="10607040" cy="640080"/>
+          </a:xfrm>
+          <a:prstGeom prst="rect">
+            <a:avLst/>
+          </a:prstGeom>
+          <a:noFill/>
+        </p:spPr>
+        <p:txBody>
+          <a:bodyPr wrap="square" lIns="0" rIns="0" tIns="0" bIns="0">
+            <a:spAutoFit/>
+          </a:bodyPr>
+          <a:lstStyle/>
+          <a:p>
+            <a:pPr algn="l"/>
+            <a:r>
+              <a:rPr sz="3000" b="1">
+                <a:solidFill>
+                  <a:srgbClr val="1E3A5F"/>
+                </a:solidFill>
+                <a:latin typeface="Noto Sans TC"/>
+              </a:rPr>
+              <a:t>情境工程 Context Engineering</a:t>
+            </a:r>
+          </a:p>
+        </p:txBody>
+      </p:sp>
+      <p:sp>
+        <p:nvSpPr>
+          <p:cNvPr id="4" name="TextBox 3"/>
+          <p:cNvSpPr txBox="1"/>
+          <p:nvPr/>
+        </p:nvSpPr>
+        <p:spPr>
+          <a:xfrm>
+            <a:off x="640080" y="1481328"/>
+            <a:ext cx="11155680" cy="457200"/>
+          </a:xfrm>
+          <a:prstGeom prst="rect">
+            <a:avLst/>
+          </a:prstGeom>
+          <a:noFill/>
+        </p:spPr>
+        <p:txBody>
+          <a:bodyPr wrap="square" lIns="0" rIns="0" tIns="0" bIns="0">
+            <a:spAutoFit/>
+          </a:bodyPr>
+          <a:lstStyle/>
+          <a:p>
+            <a:pPr algn="l"/>
+            <a:r>
+              <a:rPr sz="1450" b="0">
+                <a:solidFill>
+                  <a:srgbClr val="767C87"/>
+                </a:solidFill>
+                <a:latin typeface="Noto Sans TC"/>
+              </a:rPr>
+              <a:t>EAP 後台 Robot Settings：把防呆規則寫進平台生成階段</a:t>
+            </a:r>
+          </a:p>
+        </p:txBody>
+      </p:sp>
+      <p:sp>
+        <p:nvSpPr>
+          <p:cNvPr id="5" name="TextBox 4"/>
+          <p:cNvSpPr txBox="1"/>
+          <p:nvPr/>
+        </p:nvSpPr>
+        <p:spPr>
+          <a:xfrm>
+            <a:off x="11091672" y="6400800"/>
+            <a:ext cx="731520" cy="274320"/>
+          </a:xfrm>
+          <a:prstGeom prst="rect">
+            <a:avLst/>
+          </a:prstGeom>
+          <a:noFill/>
+        </p:spPr>
+        <p:txBody>
+          <a:bodyPr wrap="square" lIns="0" rIns="0" tIns="0" bIns="0">
+            <a:spAutoFit/>
+          </a:bodyPr>
+          <a:lstStyle/>
+          <a:p>
+            <a:pPr algn="r"/>
+            <a:r>
+              <a:rPr sz="1100" b="0">
+                <a:solidFill>
+                  <a:srgbClr val="767C87"/>
+                </a:solidFill>
+                <a:latin typeface="Noto Sans TC"/>
+              </a:rPr>
+              <a:t>None</a:t>
+            </a:r>
+          </a:p>
+        </p:txBody>
+      </p:sp>
+      <p:sp>
+        <p:nvSpPr>
+          <p:cNvPr id="6" name="Rectangle 5"/>
+          <p:cNvSpPr/>
+          <p:nvPr/>
+        </p:nvSpPr>
+        <p:spPr>
+          <a:xfrm>
+            <a:off x="640080" y="2011680"/>
+            <a:ext cx="10972800" cy="2697480"/>
+          </a:xfrm>
+          <a:prstGeom prst="rect">
+            <a:avLst/>
+          </a:prstGeom>
+          <a:solidFill>
+            <a:srgbClr val="EEF2F8"/>
+          </a:solidFill>
+          <a:ln>
+            <a:noFill/>
+          </a:ln>
+          <a:effectLst/>
+        </p:spPr>
+        <p:style>
+          <a:lnRef idx="1">
+            <a:schemeClr val="accent1"/>
+          </a:lnRef>
+          <a:fillRef idx="3">
+            <a:schemeClr val="accent1"/>
+          </a:fillRef>
+          <a:effectRef idx="2">
+            <a:schemeClr val="accent1"/>
+          </a:effectRef>
+          <a:fontRef idx="minor">
+            <a:schemeClr val="lt1"/>
+          </a:fontRef>
+        </p:style>
+        <p:txBody>
+          <a:bodyPr rtlCol="0" anchor="ctr"/>
+          <a:lstStyle/>
+          <a:p>
+            <a:pPr algn="ctr"/>
+          </a:p>
+        </p:txBody>
+      </p:sp>
+      <p:sp>
+        <p:nvSpPr>
+          <p:cNvPr id="7" name="TextBox 6"/>
+          <p:cNvSpPr txBox="1"/>
+          <p:nvPr/>
+        </p:nvSpPr>
+        <p:spPr>
+          <a:xfrm>
+            <a:off x="914400" y="2194560"/>
+            <a:ext cx="10424160" cy="2377440"/>
+          </a:xfrm>
+          <a:prstGeom prst="rect">
+            <a:avLst/>
+          </a:prstGeom>
+          <a:noFill/>
+        </p:spPr>
+        <p:txBody>
+          <a:bodyPr wrap="square" lIns="0" rIns="0" tIns="0" bIns="0">
+            <a:spAutoFit/>
+          </a:bodyPr>
+          <a:lstStyle/>
+          <a:p>
+            <a:pPr algn="l">
+              <a:spcAft>
+                <a:spcPts val="200"/>
+              </a:spcAft>
+            </a:pPr>
+            <a:r>
+              <a:rPr sz="1200" b="0">
+                <a:solidFill>
+                  <a:srgbClr val="2B3D55"/>
+                </a:solidFill>
+                <a:latin typeface="Noto Sans TC"/>
+              </a:rPr>
+              <a:t>## Semantic Adjustment（術語對映）</a:t>
+            </a:r>
+          </a:p>
+          <a:p>
+            <a:pPr algn="l">
+              <a:spcAft>
+                <a:spcPts val="200"/>
+              </a:spcAft>
+            </a:pPr>
+            <a:r>
+              <a:rPr sz="1200" b="0">
+                <a:solidFill>
+                  <a:srgbClr val="2B3D55"/>
+                </a:solidFill>
+                <a:latin typeface="Noto Sans TC"/>
+              </a:rPr>
+              <a:t>  淨手續費收入 → 手續費淨收益　　NIM → 淨利息收益率　　逾放比 → 逾期放款比率</a:t>
+            </a:r>
+          </a:p>
+          <a:p>
+            <a:pPr algn="l">
+              <a:spcAft>
+                <a:spcPts val="200"/>
+              </a:spcAft>
+            </a:pPr>
+            <a:r>
+              <a:rPr sz="1200" b="0">
+                <a:solidFill>
+                  <a:srgbClr val="2B3D55"/>
+                </a:solidFill>
+                <a:latin typeface="Noto Sans TC"/>
+              </a:rPr>
+              <a:t>  ※ 實測：問「淨手續費收入」查無，對映後才查得到 17,977</a:t>
+            </a:r>
+          </a:p>
+          <a:p>
+            <a:pPr algn="l">
+              <a:spcAft>
+                <a:spcPts val="200"/>
+              </a:spcAft>
+            </a:pPr>
+            <a:r>
+              <a:rPr sz="1200" b="0">
+                <a:solidFill>
+                  <a:srgbClr val="2B3D55"/>
+                </a:solidFill>
+                <a:latin typeface="Noto Sans TC"/>
+              </a:rPr>
+              <a:t/>
+            </a:r>
+          </a:p>
+          <a:p>
+            <a:pPr algn="l">
+              <a:spcAft>
+                <a:spcPts val="200"/>
+              </a:spcAft>
+            </a:pPr>
+            <a:r>
+              <a:rPr sz="1200" b="0">
+                <a:solidFill>
+                  <a:srgbClr val="2B3D55"/>
+                </a:solidFill>
+                <a:latin typeface="Noto Sans TC"/>
+              </a:rPr>
+              <a:t>## Setting for when unable to answer（查無資料時）</a:t>
+            </a:r>
+          </a:p>
+          <a:p>
+            <a:pPr algn="l">
+              <a:spcAft>
+                <a:spcPts val="200"/>
+              </a:spcAft>
+            </a:pPr>
+            <a:r>
+              <a:rPr sz="1200" b="0">
+                <a:solidFill>
+                  <a:srgbClr val="2B3D55"/>
+                </a:solidFill>
+                <a:latin typeface="Noto Sans TC"/>
+              </a:rPr>
+              <a:t>  明確回覆「未找到／未單獨揭露」並指出缺哪一塊；嚴禁臆測、不得用「可能」「通常」填補</a:t>
+            </a:r>
+          </a:p>
+          <a:p>
+            <a:pPr algn="l">
+              <a:spcAft>
+                <a:spcPts val="200"/>
+              </a:spcAft>
+            </a:pPr>
+            <a:r>
+              <a:rPr sz="1200" b="0">
+                <a:solidFill>
+                  <a:srgbClr val="2B3D55"/>
+                </a:solidFill>
+                <a:latin typeface="Noto Sans TC"/>
+              </a:rPr>
+              <a:t/>
+            </a:r>
+          </a:p>
+          <a:p>
+            <a:pPr algn="l">
+              <a:spcAft>
+                <a:spcPts val="200"/>
+              </a:spcAft>
+            </a:pPr>
+            <a:r>
+              <a:rPr sz="1200" b="0">
+                <a:solidFill>
+                  <a:srgbClr val="2B3D55"/>
+                </a:solidFill>
+                <a:latin typeface="Noto Sans TC"/>
+              </a:rPr>
+              <a:t>## Generate Response（生成回答）── 只放三條、放最前面</a:t>
+            </a:r>
+          </a:p>
+          <a:p>
+            <a:pPr algn="l">
+              <a:spcAft>
+                <a:spcPts val="200"/>
+              </a:spcAft>
+            </a:pPr>
+            <a:r>
+              <a:rPr sz="1200" b="0">
+                <a:solidFill>
+                  <a:srgbClr val="2B3D55"/>
+                </a:solidFill>
+                <a:latin typeface="Noto Sans TC"/>
+              </a:rPr>
+              <a:t>  1. 禁止換算單位、禁止推算數字（實測平台三次換算全錯）</a:t>
+            </a:r>
+          </a:p>
+          <a:p>
+            <a:pPr algn="l">
+              <a:spcAft>
+                <a:spcPts val="200"/>
+              </a:spcAft>
+            </a:pPr>
+            <a:r>
+              <a:rPr sz="1200" b="0">
+                <a:solidFill>
+                  <a:srgbClr val="2B3D55"/>
+                </a:solidFill>
+                <a:latin typeface="Noto Sans TC"/>
+              </a:rPr>
+              <a:t>  2. 只有「累計別」相同的數字能互相比較（3M26 只能比 3M25）</a:t>
+            </a:r>
+          </a:p>
+          <a:p>
+            <a:pPr algn="l">
+              <a:spcAft>
+                <a:spcPts val="200"/>
+              </a:spcAft>
+            </a:pPr>
+            <a:r>
+              <a:rPr sz="1200" b="0">
+                <a:solidFill>
+                  <a:srgbClr val="2B3D55"/>
+                </a:solidFill>
+                <a:latin typeface="Noto Sans TC"/>
+              </a:rPr>
+              <a:t>  3. 找不到就說找不到，不得用相近科目代答</a:t>
+            </a:r>
+          </a:p>
+        </p:txBody>
+      </p:sp>
+      <p:sp>
+        <p:nvSpPr>
+          <p:cNvPr id="8" name="TextBox 7"/>
+          <p:cNvSpPr txBox="1"/>
+          <p:nvPr/>
+        </p:nvSpPr>
+        <p:spPr>
+          <a:xfrm>
+            <a:off x="640080" y="4892040"/>
+            <a:ext cx="10972800" cy="822960"/>
+          </a:xfrm>
+          <a:prstGeom prst="rect">
+            <a:avLst/>
+          </a:prstGeom>
+          <a:noFill/>
+        </p:spPr>
+        <p:txBody>
+          <a:bodyPr wrap="square" lIns="0" rIns="0" tIns="0" bIns="0">
+            <a:spAutoFit/>
+          </a:bodyPr>
+          <a:lstStyle/>
+          <a:p>
+            <a:pPr algn="l">
+              <a:spcAft>
+                <a:spcPts val="300"/>
+              </a:spcAft>
+            </a:pPr>
+            <a:r>
+              <a:rPr sz="1200" b="0">
+                <a:solidFill>
+                  <a:srgbClr val="434343"/>
+                </a:solidFill>
+                <a:latin typeface="Noto Sans TC"/>
+              </a:rPr>
+              <a:t>三個實測結論：① 寫「禁止句」不寫「流程描述」　② 規則指名資料欄位（累計別／單位／層級）　③ 生成階段規則要極少——六條時 A／C／E 全部失敗，模型只讀開頭幾句</a:t>
+            </a:r>
+          </a:p>
+        </p:txBody>
+      </p:sp>
+      <p:sp>
+        <p:nvSpPr>
+          <p:cNvPr id="9" name="TextBox 8"/>
+          <p:cNvSpPr txBox="1"/>
+          <p:nvPr/>
+        </p:nvSpPr>
+        <p:spPr>
+          <a:xfrm>
+            <a:off x="640080" y="5989320"/>
+            <a:ext cx="10972800" cy="457200"/>
+          </a:xfrm>
+          <a:prstGeom prst="rect">
+            <a:avLst/>
+          </a:prstGeom>
+          <a:noFill/>
+        </p:spPr>
+        <p:txBody>
+          <a:bodyPr wrap="square" lIns="0" rIns="0" tIns="0" bIns="0">
+            <a:spAutoFit/>
+          </a:bodyPr>
+          <a:lstStyle/>
+          <a:p>
+            <a:pPr algn="l"/>
+            <a:r>
+              <a:rPr sz="1300" b="1">
+                <a:solidFill>
+                  <a:srgbClr val="1E3A5F"/>
+                </a:solidFill>
+                <a:latin typeface="Noto Sans TC"/>
+              </a:rPr>
+              <a:t>改完必測：scripts/verify_eap_prompts.py（七題自動驗證，每題開新聊天室避免記憶污染）</a:t>
+            </a:r>
+          </a:p>
+        </p:txBody>
+      </p:sp>
+    </p:spTree>
+  </p:cSld>
+  <p:clrMapOvr>
+    <a:masterClrMapping/>
+  </p:clrMapOvr>
+</p:sld>
+</file>
+
 <file path=ppt/slides/slide2.xml><?xml version="1.0" encoding="utf-8"?>
 <p:sld xmlns:a="http://schemas.openxmlformats.org/drawingml/2006/main" xmlns:r="http://schemas.openxmlformats.org/officeDocument/2006/relationships" xmlns:p="http://schemas.openxmlformats.org/presentationml/2006/main">
   <p:cSld>
@@ -12254,6 +12655,1093 @@
                 <a:cs typeface="Microsoft JhengHei"/>
               </a:rPr>
               <a:t>02</a:t>
+            </a:r>
+          </a:p>
+        </p:txBody>
+      </p:sp>
+    </p:spTree>
+  </p:cSld>
+  <p:clrMapOvr>
+    <a:masterClrMapping/>
+  </p:clrMapOvr>
+</p:sld>
+</file>
+
+<file path=ppt/slides/slide20.xml><?xml version="1.0" encoding="utf-8"?>
+<p:sld xmlns:a="http://schemas.openxmlformats.org/drawingml/2006/main" xmlns:p="http://schemas.openxmlformats.org/presentationml/2006/main" xmlns:r="http://schemas.openxmlformats.org/officeDocument/2006/relationships">
+  <p:cSld>
+    <p:spTree>
+      <p:nvGrpSpPr>
+        <p:cNvPr id="1" name=""/>
+        <p:cNvGrpSpPr/>
+        <p:nvPr/>
+      </p:nvGrpSpPr>
+      <p:grpSpPr/>
+      <p:sp>
+        <p:nvSpPr>
+          <p:cNvPr id="2" name="TextBox 1"/>
+          <p:cNvSpPr txBox="1"/>
+          <p:nvPr/>
+        </p:nvSpPr>
+        <p:spPr>
+          <a:xfrm>
+            <a:off x="640080" y="457200"/>
+            <a:ext cx="10058400" cy="365760"/>
+          </a:xfrm>
+          <a:prstGeom prst="rect">
+            <a:avLst/>
+          </a:prstGeom>
+          <a:noFill/>
+        </p:spPr>
+        <p:txBody>
+          <a:bodyPr wrap="square" lIns="0" rIns="0" tIns="0" bIns="0">
+            <a:spAutoFit/>
+          </a:bodyPr>
+          <a:lstStyle/>
+          <a:p>
+            <a:pPr algn="l"/>
+            <a:r>
+              <a:rPr sz="1350" b="1">
+                <a:solidFill>
+                  <a:srgbClr val="E8654E"/>
+                </a:solidFill>
+                <a:latin typeface="Noto Sans TC"/>
+              </a:rPr>
+              <a:t>MODEL DESIGN · 語意知識網</a:t>
+            </a:r>
+          </a:p>
+        </p:txBody>
+      </p:sp>
+      <p:sp>
+        <p:nvSpPr>
+          <p:cNvPr id="3" name="TextBox 2"/>
+          <p:cNvSpPr txBox="1"/>
+          <p:nvPr/>
+        </p:nvSpPr>
+        <p:spPr>
+          <a:xfrm>
+            <a:off x="640080" y="804672"/>
+            <a:ext cx="10607040" cy="640080"/>
+          </a:xfrm>
+          <a:prstGeom prst="rect">
+            <a:avLst/>
+          </a:prstGeom>
+          <a:noFill/>
+        </p:spPr>
+        <p:txBody>
+          <a:bodyPr wrap="square" lIns="0" rIns="0" tIns="0" bIns="0">
+            <a:spAutoFit/>
+          </a:bodyPr>
+          <a:lstStyle/>
+          <a:p>
+            <a:pPr algn="l"/>
+            <a:r>
+              <a:rPr sz="3000" b="1">
+                <a:solidFill>
+                  <a:srgbClr val="1E3A5F"/>
+                </a:solidFill>
+                <a:latin typeface="Noto Sans TC"/>
+              </a:rPr>
+              <a:t>模型設計 — 每指標唯一節點 ＋ 關聯圖</a:t>
+            </a:r>
+          </a:p>
+        </p:txBody>
+      </p:sp>
+      <p:sp>
+        <p:nvSpPr>
+          <p:cNvPr id="4" name="TextBox 3"/>
+          <p:cNvSpPr txBox="1"/>
+          <p:nvPr/>
+        </p:nvSpPr>
+        <p:spPr>
+          <a:xfrm>
+            <a:off x="640080" y="1481328"/>
+            <a:ext cx="11155680" cy="457200"/>
+          </a:xfrm>
+          <a:prstGeom prst="rect">
+            <a:avLst/>
+          </a:prstGeom>
+          <a:noFill/>
+        </p:spPr>
+        <p:txBody>
+          <a:bodyPr wrap="square" lIns="0" rIns="0" tIns="0" bIns="0">
+            <a:spAutoFit/>
+          </a:bodyPr>
+          <a:lstStyle/>
+          <a:p>
+            <a:pPr algn="l"/>
+            <a:r>
+              <a:rPr sz="1450" b="0">
+                <a:solidFill>
+                  <a:srgbClr val="767C87"/>
+                </a:solidFill>
+                <a:latin typeface="Noto Sans TC"/>
+              </a:rPr>
+              <a:t>1,255 個唯一節點，另加維度關聯：金控→子公司、金控→關鍵指標</a:t>
+            </a:r>
+          </a:p>
+        </p:txBody>
+      </p:sp>
+      <p:sp>
+        <p:nvSpPr>
+          <p:cNvPr id="5" name="TextBox 4"/>
+          <p:cNvSpPr txBox="1"/>
+          <p:nvPr/>
+        </p:nvSpPr>
+        <p:spPr>
+          <a:xfrm>
+            <a:off x="11091672" y="6400800"/>
+            <a:ext cx="731520" cy="274320"/>
+          </a:xfrm>
+          <a:prstGeom prst="rect">
+            <a:avLst/>
+          </a:prstGeom>
+          <a:noFill/>
+        </p:spPr>
+        <p:txBody>
+          <a:bodyPr wrap="square" lIns="0" rIns="0" tIns="0" bIns="0">
+            <a:spAutoFit/>
+          </a:bodyPr>
+          <a:lstStyle/>
+          <a:p>
+            <a:pPr algn="r"/>
+            <a:r>
+              <a:rPr sz="1100" b="0">
+                <a:solidFill>
+                  <a:srgbClr val="767C87"/>
+                </a:solidFill>
+                <a:latin typeface="Noto Sans TC"/>
+              </a:rPr>
+              <a:t>None</a:t>
+            </a:r>
+          </a:p>
+        </p:txBody>
+      </p:sp>
+      <p:sp>
+        <p:nvSpPr>
+          <p:cNvPr id="6" name="Rectangle 5"/>
+          <p:cNvSpPr/>
+          <p:nvPr/>
+        </p:nvSpPr>
+        <p:spPr>
+          <a:xfrm>
+            <a:off x="640080" y="2011680"/>
+            <a:ext cx="6766560" cy="3566160"/>
+          </a:xfrm>
+          <a:prstGeom prst="rect">
+            <a:avLst/>
+          </a:prstGeom>
+          <a:solidFill>
+            <a:srgbClr val="FAFBFC"/>
+          </a:solidFill>
+          <a:ln w="9525">
+            <a:solidFill>
+              <a:srgbClr val="D8DEE6"/>
+            </a:solidFill>
+          </a:ln>
+          <a:effectLst/>
+        </p:spPr>
+        <p:style>
+          <a:lnRef idx="1">
+            <a:schemeClr val="accent1"/>
+          </a:lnRef>
+          <a:fillRef idx="3">
+            <a:schemeClr val="accent1"/>
+          </a:fillRef>
+          <a:effectRef idx="2">
+            <a:schemeClr val="accent1"/>
+          </a:effectRef>
+          <a:fontRef idx="minor">
+            <a:schemeClr val="lt1"/>
+          </a:fontRef>
+        </p:style>
+        <p:txBody>
+          <a:bodyPr rtlCol="0" anchor="ctr"/>
+          <a:lstStyle/>
+          <a:p>
+            <a:pPr algn="ctr"/>
+          </a:p>
+        </p:txBody>
+      </p:sp>
+      <p:sp>
+        <p:nvSpPr>
+          <p:cNvPr id="7" name="TextBox 6"/>
+          <p:cNvSpPr txBox="1"/>
+          <p:nvPr/>
+        </p:nvSpPr>
+        <p:spPr>
+          <a:xfrm>
+            <a:off x="822959" y="3474720"/>
+            <a:ext cx="6400800" cy="640080"/>
+          </a:xfrm>
+          <a:prstGeom prst="rect">
+            <a:avLst/>
+          </a:prstGeom>
+          <a:noFill/>
+        </p:spPr>
+        <p:txBody>
+          <a:bodyPr wrap="square" lIns="0" rIns="0" tIns="0" bIns="0">
+            <a:spAutoFit/>
+          </a:bodyPr>
+          <a:lstStyle/>
+          <a:p>
+            <a:pPr algn="ctr"/>
+            <a:r>
+              <a:rPr sz="1300" b="0">
+                <a:solidFill>
+                  <a:srgbClr val="767C87"/>
+                </a:solidFill>
+                <a:latin typeface="Noto Sans TC"/>
+              </a:rPr>
+              <a:t>（貼 EAP『探索關連』截圖：金控中心放射出子公司(紅)與關鍵指標(綠)）</a:t>
+            </a:r>
+          </a:p>
+        </p:txBody>
+      </p:sp>
+      <p:sp>
+        <p:nvSpPr>
+          <p:cNvPr id="8" name="Rectangle 7"/>
+          <p:cNvSpPr/>
+          <p:nvPr/>
+        </p:nvSpPr>
+        <p:spPr>
+          <a:xfrm>
+            <a:off x="7635240" y="2011680"/>
+            <a:ext cx="3931920" cy="1691640"/>
+          </a:xfrm>
+          <a:prstGeom prst="rect">
+            <a:avLst/>
+          </a:prstGeom>
+          <a:solidFill>
+            <a:srgbClr val="F6F8FB"/>
+          </a:solidFill>
+          <a:ln>
+            <a:noFill/>
+          </a:ln>
+          <a:effectLst/>
+        </p:spPr>
+        <p:style>
+          <a:lnRef idx="1">
+            <a:schemeClr val="accent1"/>
+          </a:lnRef>
+          <a:fillRef idx="3">
+            <a:schemeClr val="accent1"/>
+          </a:fillRef>
+          <a:effectRef idx="2">
+            <a:schemeClr val="accent1"/>
+          </a:effectRef>
+          <a:fontRef idx="minor">
+            <a:schemeClr val="lt1"/>
+          </a:fontRef>
+        </p:style>
+        <p:txBody>
+          <a:bodyPr rtlCol="0" anchor="ctr"/>
+          <a:lstStyle/>
+          <a:p>
+            <a:pPr algn="ctr"/>
+          </a:p>
+        </p:txBody>
+      </p:sp>
+      <p:sp>
+        <p:nvSpPr>
+          <p:cNvPr id="9" name="Rectangle 8"/>
+          <p:cNvSpPr/>
+          <p:nvPr/>
+        </p:nvSpPr>
+        <p:spPr>
+          <a:xfrm>
+            <a:off x="7635240" y="2011680"/>
+            <a:ext cx="109728" cy="1691640"/>
+          </a:xfrm>
+          <a:prstGeom prst="rect">
+            <a:avLst/>
+          </a:prstGeom>
+          <a:solidFill>
+            <a:srgbClr val="E8654E"/>
+          </a:solidFill>
+          <a:ln>
+            <a:noFill/>
+          </a:ln>
+          <a:effectLst/>
+        </p:spPr>
+        <p:style>
+          <a:lnRef idx="1">
+            <a:schemeClr val="accent1"/>
+          </a:lnRef>
+          <a:fillRef idx="3">
+            <a:schemeClr val="accent1"/>
+          </a:fillRef>
+          <a:effectRef idx="2">
+            <a:schemeClr val="accent1"/>
+          </a:effectRef>
+          <a:fontRef idx="minor">
+            <a:schemeClr val="lt1"/>
+          </a:fontRef>
+        </p:style>
+        <p:txBody>
+          <a:bodyPr rtlCol="0" anchor="ctr"/>
+          <a:lstStyle/>
+          <a:p>
+            <a:pPr algn="ctr"/>
+          </a:p>
+        </p:txBody>
+      </p:sp>
+      <p:sp>
+        <p:nvSpPr>
+          <p:cNvPr id="10" name="TextBox 9"/>
+          <p:cNvSpPr txBox="1"/>
+          <p:nvPr/>
+        </p:nvSpPr>
+        <p:spPr>
+          <a:xfrm>
+            <a:off x="7955279" y="2267712"/>
+            <a:ext cx="3429000" cy="457200"/>
+          </a:xfrm>
+          <a:prstGeom prst="rect">
+            <a:avLst/>
+          </a:prstGeom>
+          <a:noFill/>
+        </p:spPr>
+        <p:txBody>
+          <a:bodyPr wrap="square" lIns="0" rIns="0" tIns="0" bIns="0">
+            <a:spAutoFit/>
+          </a:bodyPr>
+          <a:lstStyle/>
+          <a:p>
+            <a:pPr algn="l"/>
+            <a:r>
+              <a:rPr sz="1600" b="1">
+                <a:solidFill>
+                  <a:srgbClr val="E8654E"/>
+                </a:solidFill>
+                <a:latin typeface="Noto Sans TC"/>
+              </a:rPr>
+              <a:t>為什麼唯一節點</a:t>
+            </a:r>
+          </a:p>
+        </p:txBody>
+      </p:sp>
+      <p:sp>
+        <p:nvSpPr>
+          <p:cNvPr id="11" name="TextBox 10"/>
+          <p:cNvSpPr txBox="1"/>
+          <p:nvPr/>
+        </p:nvSpPr>
+        <p:spPr>
+          <a:xfrm>
+            <a:off x="7955279" y="2788920"/>
+            <a:ext cx="3383279" cy="777240"/>
+          </a:xfrm>
+          <a:prstGeom prst="rect">
+            <a:avLst/>
+          </a:prstGeom>
+          <a:noFill/>
+        </p:spPr>
+        <p:txBody>
+          <a:bodyPr wrap="square" lIns="0" rIns="0" tIns="0" bIns="0">
+            <a:spAutoFit/>
+          </a:bodyPr>
+          <a:lstStyle/>
+          <a:p>
+            <a:pPr algn="l">
+              <a:spcAft>
+                <a:spcPts val="400"/>
+              </a:spcAft>
+            </a:pPr>
+            <a:r>
+              <a:rPr sz="1200" b="0">
+                <a:solidFill>
+                  <a:srgbClr val="434343"/>
+                </a:solidFill>
+                <a:latin typeface="Noto Sans TC"/>
+              </a:rPr>
+              <a:t>公司｜期間｜指標 三者組唯一鍵，</a:t>
+            </a:r>
+          </a:p>
+          <a:p>
+            <a:pPr algn="l">
+              <a:spcAft>
+                <a:spcPts val="400"/>
+              </a:spcAft>
+            </a:pPr>
+            <a:r>
+              <a:rPr sz="1200" b="0">
+                <a:solidFill>
+                  <a:srgbClr val="434343"/>
+                </a:solidFill>
+                <a:latin typeface="Noto Sans TC"/>
+              </a:rPr>
+              <a:t>數值掛屬性上。同名指標跨季</a:t>
+            </a:r>
+          </a:p>
+          <a:p>
+            <a:pPr algn="l">
+              <a:spcAft>
+                <a:spcPts val="400"/>
+              </a:spcAft>
+            </a:pPr>
+            <a:r>
+              <a:rPr sz="1200" b="0">
+                <a:solidFill>
+                  <a:srgbClr val="434343"/>
+                </a:solidFill>
+                <a:latin typeface="Noto Sans TC"/>
+              </a:rPr>
+              <a:t>不共用節點——跨期間誤答消失。</a:t>
+            </a:r>
+          </a:p>
+        </p:txBody>
+      </p:sp>
+      <p:sp>
+        <p:nvSpPr>
+          <p:cNvPr id="12" name="Rectangle 11"/>
+          <p:cNvSpPr/>
+          <p:nvPr/>
+        </p:nvSpPr>
+        <p:spPr>
+          <a:xfrm>
+            <a:off x="7635240" y="3886200"/>
+            <a:ext cx="3931920" cy="1691640"/>
+          </a:xfrm>
+          <a:prstGeom prst="rect">
+            <a:avLst/>
+          </a:prstGeom>
+          <a:solidFill>
+            <a:srgbClr val="F6F8FB"/>
+          </a:solidFill>
+          <a:ln>
+            <a:noFill/>
+          </a:ln>
+          <a:effectLst/>
+        </p:spPr>
+        <p:style>
+          <a:lnRef idx="1">
+            <a:schemeClr val="accent1"/>
+          </a:lnRef>
+          <a:fillRef idx="3">
+            <a:schemeClr val="accent1"/>
+          </a:fillRef>
+          <a:effectRef idx="2">
+            <a:schemeClr val="accent1"/>
+          </a:effectRef>
+          <a:fontRef idx="minor">
+            <a:schemeClr val="lt1"/>
+          </a:fontRef>
+        </p:style>
+        <p:txBody>
+          <a:bodyPr rtlCol="0" anchor="ctr"/>
+          <a:lstStyle/>
+          <a:p>
+            <a:pPr algn="ctr"/>
+          </a:p>
+        </p:txBody>
+      </p:sp>
+      <p:sp>
+        <p:nvSpPr>
+          <p:cNvPr id="13" name="Rectangle 12"/>
+          <p:cNvSpPr/>
+          <p:nvPr/>
+        </p:nvSpPr>
+        <p:spPr>
+          <a:xfrm>
+            <a:off x="7635240" y="3886200"/>
+            <a:ext cx="109728" cy="1691640"/>
+          </a:xfrm>
+          <a:prstGeom prst="rect">
+            <a:avLst/>
+          </a:prstGeom>
+          <a:solidFill>
+            <a:srgbClr val="2E7D46"/>
+          </a:solidFill>
+          <a:ln>
+            <a:noFill/>
+          </a:ln>
+          <a:effectLst/>
+        </p:spPr>
+        <p:style>
+          <a:lnRef idx="1">
+            <a:schemeClr val="accent1"/>
+          </a:lnRef>
+          <a:fillRef idx="3">
+            <a:schemeClr val="accent1"/>
+          </a:fillRef>
+          <a:effectRef idx="2">
+            <a:schemeClr val="accent1"/>
+          </a:effectRef>
+          <a:fontRef idx="minor">
+            <a:schemeClr val="lt1"/>
+          </a:fontRef>
+        </p:style>
+        <p:txBody>
+          <a:bodyPr rtlCol="0" anchor="ctr"/>
+          <a:lstStyle/>
+          <a:p>
+            <a:pPr algn="ctr"/>
+          </a:p>
+        </p:txBody>
+      </p:sp>
+      <p:sp>
+        <p:nvSpPr>
+          <p:cNvPr id="14" name="TextBox 13"/>
+          <p:cNvSpPr txBox="1"/>
+          <p:nvPr/>
+        </p:nvSpPr>
+        <p:spPr>
+          <a:xfrm>
+            <a:off x="7955279" y="4142232"/>
+            <a:ext cx="3429000" cy="457200"/>
+          </a:xfrm>
+          <a:prstGeom prst="rect">
+            <a:avLst/>
+          </a:prstGeom>
+          <a:noFill/>
+        </p:spPr>
+        <p:txBody>
+          <a:bodyPr wrap="square" lIns="0" rIns="0" tIns="0" bIns="0">
+            <a:spAutoFit/>
+          </a:bodyPr>
+          <a:lstStyle/>
+          <a:p>
+            <a:pPr algn="l"/>
+            <a:r>
+              <a:rPr sz="1600" b="1">
+                <a:solidFill>
+                  <a:srgbClr val="2E7D46"/>
+                </a:solidFill>
+                <a:latin typeface="Noto Sans TC"/>
+              </a:rPr>
+              <a:t>關聯疊加（不破壞正確性）</a:t>
+            </a:r>
+          </a:p>
+        </p:txBody>
+      </p:sp>
+      <p:sp>
+        <p:nvSpPr>
+          <p:cNvPr id="15" name="TextBox 14"/>
+          <p:cNvSpPr txBox="1"/>
+          <p:nvPr/>
+        </p:nvSpPr>
+        <p:spPr>
+          <a:xfrm>
+            <a:off x="7955279" y="4663440"/>
+            <a:ext cx="3383279" cy="777240"/>
+          </a:xfrm>
+          <a:prstGeom prst="rect">
+            <a:avLst/>
+          </a:prstGeom>
+          <a:noFill/>
+        </p:spPr>
+        <p:txBody>
+          <a:bodyPr wrap="square" lIns="0" rIns="0" tIns="0" bIns="0">
+            <a:spAutoFit/>
+          </a:bodyPr>
+          <a:lstStyle/>
+          <a:p>
+            <a:pPr algn="l">
+              <a:spcAft>
+                <a:spcPts val="400"/>
+              </a:spcAft>
+            </a:pPr>
+            <a:r>
+              <a:rPr sz="1200" b="0">
+                <a:solidFill>
+                  <a:srgbClr val="434343"/>
+                </a:solidFill>
+                <a:latin typeface="Noto Sans TC"/>
+              </a:rPr>
+              <a:t>另加金控／子公司維度節點與邊，</a:t>
+            </a:r>
+          </a:p>
+          <a:p>
+            <a:pPr algn="l">
+              <a:spcAft>
+                <a:spcPts val="400"/>
+              </a:spcAft>
+            </a:pPr>
+            <a:r>
+              <a:rPr sz="1200" b="0">
+                <a:solidFill>
+                  <a:srgbClr val="434343"/>
+                </a:solidFill>
+                <a:latin typeface="Noto Sans TC"/>
+              </a:rPr>
+              <a:t>指標節點仍唯一。紅＝子公司、</a:t>
+            </a:r>
+          </a:p>
+          <a:p>
+            <a:pPr algn="l">
+              <a:spcAft>
+                <a:spcPts val="400"/>
+              </a:spcAft>
+            </a:pPr>
+            <a:r>
+              <a:rPr sz="1200" b="0">
+                <a:solidFill>
+                  <a:srgbClr val="434343"/>
+                </a:solidFill>
+                <a:latin typeface="Noto Sans TC"/>
+              </a:rPr>
+              <a:t>綠＝指標——層級一眼可見。</a:t>
+            </a:r>
+          </a:p>
+        </p:txBody>
+      </p:sp>
+      <p:sp>
+        <p:nvSpPr>
+          <p:cNvPr id="16" name="TextBox 15"/>
+          <p:cNvSpPr txBox="1"/>
+          <p:nvPr/>
+        </p:nvSpPr>
+        <p:spPr>
+          <a:xfrm>
+            <a:off x="640080" y="5897880"/>
+            <a:ext cx="10972800" cy="457200"/>
+          </a:xfrm>
+          <a:prstGeom prst="rect">
+            <a:avLst/>
+          </a:prstGeom>
+          <a:noFill/>
+        </p:spPr>
+        <p:txBody>
+          <a:bodyPr wrap="square" lIns="0" rIns="0" tIns="0" bIns="0">
+            <a:spAutoFit/>
+          </a:bodyPr>
+          <a:lstStyle/>
+          <a:p>
+            <a:pPr algn="l"/>
+            <a:r>
+              <a:rPr sz="1300" b="1">
+                <a:solidFill>
+                  <a:srgbClr val="1E3A5F"/>
+                </a:solidFill>
+                <a:latin typeface="Noto Sans TC"/>
+              </a:rPr>
+              <a:t>顏色分層正是防呆的視覺化：不同層級適用不同法規，系統據此擋下跨層級比較。</a:t>
+            </a:r>
+          </a:p>
+        </p:txBody>
+      </p:sp>
+    </p:spTree>
+  </p:cSld>
+  <p:clrMapOvr>
+    <a:masterClrMapping/>
+  </p:clrMapOvr>
+</p:sld>
+</file>
+
+<file path=ppt/slides/slide21.xml><?xml version="1.0" encoding="utf-8"?>
+<p:sld xmlns:a="http://schemas.openxmlformats.org/drawingml/2006/main" xmlns:p="http://schemas.openxmlformats.org/presentationml/2006/main" xmlns:r="http://schemas.openxmlformats.org/officeDocument/2006/relationships">
+  <p:cSld>
+    <p:spTree>
+      <p:nvGrpSpPr>
+        <p:cNvPr id="1" name=""/>
+        <p:cNvGrpSpPr/>
+        <p:nvPr/>
+      </p:nvGrpSpPr>
+      <p:grpSpPr/>
+      <p:sp>
+        <p:nvSpPr>
+          <p:cNvPr id="2" name="TextBox 1"/>
+          <p:cNvSpPr txBox="1"/>
+          <p:nvPr/>
+        </p:nvSpPr>
+        <p:spPr>
+          <a:xfrm>
+            <a:off x="640080" y="457200"/>
+            <a:ext cx="10058400" cy="365760"/>
+          </a:xfrm>
+          <a:prstGeom prst="rect">
+            <a:avLst/>
+          </a:prstGeom>
+          <a:noFill/>
+        </p:spPr>
+        <p:txBody>
+          <a:bodyPr wrap="square" lIns="0" rIns="0" tIns="0" bIns="0">
+            <a:spAutoFit/>
+          </a:bodyPr>
+          <a:lstStyle/>
+          <a:p>
+            <a:pPr algn="l"/>
+            <a:r>
+              <a:rPr sz="1350" b="1">
+                <a:solidFill>
+                  <a:srgbClr val="E8654E"/>
+                </a:solidFill>
+                <a:latin typeface="Noto Sans TC"/>
+              </a:rPr>
+              <a:t>PLATFORM QA · EAP 平台實機問答</a:t>
+            </a:r>
+          </a:p>
+        </p:txBody>
+      </p:sp>
+      <p:sp>
+        <p:nvSpPr>
+          <p:cNvPr id="3" name="TextBox 2"/>
+          <p:cNvSpPr txBox="1"/>
+          <p:nvPr/>
+        </p:nvSpPr>
+        <p:spPr>
+          <a:xfrm>
+            <a:off x="640080" y="804672"/>
+            <a:ext cx="10607040" cy="640080"/>
+          </a:xfrm>
+          <a:prstGeom prst="rect">
+            <a:avLst/>
+          </a:prstGeom>
+          <a:noFill/>
+        </p:spPr>
+        <p:txBody>
+          <a:bodyPr wrap="square" lIns="0" rIns="0" tIns="0" bIns="0">
+            <a:spAutoFit/>
+          </a:bodyPr>
+          <a:lstStyle/>
+          <a:p>
+            <a:pPr algn="l"/>
+            <a:r>
+              <a:rPr sz="3000" b="1">
+                <a:solidFill>
+                  <a:srgbClr val="1E3A5F"/>
+                </a:solidFill>
+                <a:latin typeface="Noto Sans TC"/>
+              </a:rPr>
+              <a:t>平台 QA 畫面</a:t>
+            </a:r>
+          </a:p>
+        </p:txBody>
+      </p:sp>
+      <p:sp>
+        <p:nvSpPr>
+          <p:cNvPr id="4" name="TextBox 3"/>
+          <p:cNvSpPr txBox="1"/>
+          <p:nvPr/>
+        </p:nvSpPr>
+        <p:spPr>
+          <a:xfrm>
+            <a:off x="640080" y="1481328"/>
+            <a:ext cx="11155680" cy="457200"/>
+          </a:xfrm>
+          <a:prstGeom prst="rect">
+            <a:avLst/>
+          </a:prstGeom>
+          <a:noFill/>
+        </p:spPr>
+        <p:txBody>
+          <a:bodyPr wrap="square" lIns="0" rIns="0" tIns="0" bIns="0">
+            <a:spAutoFit/>
+          </a:bodyPr>
+          <a:lstStyle/>
+          <a:p>
+            <a:pPr algn="l"/>
+            <a:r>
+              <a:rPr sz="1450" b="0">
+                <a:solidFill>
+                  <a:srgbClr val="767C87"/>
+                </a:solidFill>
+                <a:latin typeface="Noto Sans TC"/>
+              </a:rPr>
+              <a:t>以 EAP 為主引擎，本地六道防護把關——數字對、驗得了</a:t>
+            </a:r>
+          </a:p>
+        </p:txBody>
+      </p:sp>
+      <p:sp>
+        <p:nvSpPr>
+          <p:cNvPr id="5" name="TextBox 4"/>
+          <p:cNvSpPr txBox="1"/>
+          <p:nvPr/>
+        </p:nvSpPr>
+        <p:spPr>
+          <a:xfrm>
+            <a:off x="11091672" y="6400800"/>
+            <a:ext cx="731520" cy="274320"/>
+          </a:xfrm>
+          <a:prstGeom prst="rect">
+            <a:avLst/>
+          </a:prstGeom>
+          <a:noFill/>
+        </p:spPr>
+        <p:txBody>
+          <a:bodyPr wrap="square" lIns="0" rIns="0" tIns="0" bIns="0">
+            <a:spAutoFit/>
+          </a:bodyPr>
+          <a:lstStyle/>
+          <a:p>
+            <a:pPr algn="r"/>
+            <a:r>
+              <a:rPr sz="1100" b="0">
+                <a:solidFill>
+                  <a:srgbClr val="767C87"/>
+                </a:solidFill>
+                <a:latin typeface="Noto Sans TC"/>
+              </a:rPr>
+              <a:t>None</a:t>
+            </a:r>
+          </a:p>
+        </p:txBody>
+      </p:sp>
+      <p:sp>
+        <p:nvSpPr>
+          <p:cNvPr id="6" name="TextBox 5"/>
+          <p:cNvSpPr txBox="1"/>
+          <p:nvPr/>
+        </p:nvSpPr>
+        <p:spPr>
+          <a:xfrm>
+            <a:off x="640080" y="1965960"/>
+            <a:ext cx="5486400" cy="411480"/>
+          </a:xfrm>
+          <a:prstGeom prst="rect">
+            <a:avLst/>
+          </a:prstGeom>
+          <a:noFill/>
+        </p:spPr>
+        <p:txBody>
+          <a:bodyPr wrap="square" lIns="0" rIns="0" tIns="0" bIns="0">
+            <a:spAutoFit/>
+          </a:bodyPr>
+          <a:lstStyle/>
+          <a:p>
+            <a:pPr algn="l"/>
+            <a:r>
+              <a:rPr sz="1300" b="1">
+                <a:solidFill>
+                  <a:srgbClr val="1E3A5F"/>
+                </a:solidFill>
+                <a:latin typeface="Noto Sans TC"/>
+              </a:rPr>
+              <a:t>「國泰世華銀行 2026Q1 稅後淨利？」</a:t>
+            </a:r>
+          </a:p>
+        </p:txBody>
+      </p:sp>
+      <p:sp>
+        <p:nvSpPr>
+          <p:cNvPr id="7" name="Rectangle 6"/>
+          <p:cNvSpPr/>
+          <p:nvPr/>
+        </p:nvSpPr>
+        <p:spPr>
+          <a:xfrm>
+            <a:off x="640080" y="2423160"/>
+            <a:ext cx="5486400" cy="3154680"/>
+          </a:xfrm>
+          <a:prstGeom prst="rect">
+            <a:avLst/>
+          </a:prstGeom>
+          <a:solidFill>
+            <a:srgbClr val="FAFBFC"/>
+          </a:solidFill>
+          <a:ln w="9525">
+            <a:solidFill>
+              <a:srgbClr val="D8DEE6"/>
+            </a:solidFill>
+          </a:ln>
+          <a:effectLst/>
+        </p:spPr>
+        <p:style>
+          <a:lnRef idx="1">
+            <a:schemeClr val="accent1"/>
+          </a:lnRef>
+          <a:fillRef idx="3">
+            <a:schemeClr val="accent1"/>
+          </a:fillRef>
+          <a:effectRef idx="2">
+            <a:schemeClr val="accent1"/>
+          </a:effectRef>
+          <a:fontRef idx="minor">
+            <a:schemeClr val="lt1"/>
+          </a:fontRef>
+        </p:style>
+        <p:txBody>
+          <a:bodyPr rtlCol="0" anchor="ctr"/>
+          <a:lstStyle/>
+          <a:p>
+            <a:pPr algn="ctr"/>
+          </a:p>
+        </p:txBody>
+      </p:sp>
+      <p:sp>
+        <p:nvSpPr>
+          <p:cNvPr id="8" name="TextBox 7"/>
+          <p:cNvSpPr txBox="1"/>
+          <p:nvPr/>
+        </p:nvSpPr>
+        <p:spPr>
+          <a:xfrm>
+            <a:off x="822959" y="3680460"/>
+            <a:ext cx="5120640" cy="640080"/>
+          </a:xfrm>
+          <a:prstGeom prst="rect">
+            <a:avLst/>
+          </a:prstGeom>
+          <a:noFill/>
+        </p:spPr>
+        <p:txBody>
+          <a:bodyPr wrap="square" lIns="0" rIns="0" tIns="0" bIns="0">
+            <a:spAutoFit/>
+          </a:bodyPr>
+          <a:lstStyle/>
+          <a:p>
+            <a:pPr algn="ctr"/>
+            <a:r>
+              <a:rPr sz="1300" b="0">
+                <a:solidFill>
+                  <a:srgbClr val="767C87"/>
+                </a:solidFill>
+                <a:latin typeface="Noto Sans TC"/>
+              </a:rPr>
+              <a:t>（貼 EAP 回答截圖：132 億元、附出處）</a:t>
+            </a:r>
+          </a:p>
+        </p:txBody>
+      </p:sp>
+      <p:sp>
+        <p:nvSpPr>
+          <p:cNvPr id="9" name="TextBox 8"/>
+          <p:cNvSpPr txBox="1"/>
+          <p:nvPr/>
+        </p:nvSpPr>
+        <p:spPr>
+          <a:xfrm>
+            <a:off x="6446520" y="1965960"/>
+            <a:ext cx="5120640" cy="411480"/>
+          </a:xfrm>
+          <a:prstGeom prst="rect">
+            <a:avLst/>
+          </a:prstGeom>
+          <a:noFill/>
+        </p:spPr>
+        <p:txBody>
+          <a:bodyPr wrap="square" lIns="0" rIns="0" tIns="0" bIns="0">
+            <a:spAutoFit/>
+          </a:bodyPr>
+          <a:lstStyle/>
+          <a:p>
+            <a:pPr algn="l"/>
+            <a:r>
+              <a:rPr sz="1300" b="1">
+                <a:solidFill>
+                  <a:srgbClr val="1E3A5F"/>
+                </a:solidFill>
+                <a:latin typeface="Noto Sans TC"/>
+              </a:rPr>
+              <a:t>「國泰各子公司稅後淨利？」→ 觸發交叉驗證</a:t>
+            </a:r>
+          </a:p>
+        </p:txBody>
+      </p:sp>
+      <p:sp>
+        <p:nvSpPr>
+          <p:cNvPr id="10" name="Rectangle 9"/>
+          <p:cNvSpPr/>
+          <p:nvPr/>
+        </p:nvSpPr>
+        <p:spPr>
+          <a:xfrm>
+            <a:off x="6446520" y="2423160"/>
+            <a:ext cx="5120640" cy="3154680"/>
+          </a:xfrm>
+          <a:prstGeom prst="rect">
+            <a:avLst/>
+          </a:prstGeom>
+          <a:solidFill>
+            <a:srgbClr val="FAFBFC"/>
+          </a:solidFill>
+          <a:ln w="9525">
+            <a:solidFill>
+              <a:srgbClr val="D8DEE6"/>
+            </a:solidFill>
+          </a:ln>
+          <a:effectLst/>
+        </p:spPr>
+        <p:style>
+          <a:lnRef idx="1">
+            <a:schemeClr val="accent1"/>
+          </a:lnRef>
+          <a:fillRef idx="3">
+            <a:schemeClr val="accent1"/>
+          </a:fillRef>
+          <a:effectRef idx="2">
+            <a:schemeClr val="accent1"/>
+          </a:effectRef>
+          <a:fontRef idx="minor">
+            <a:schemeClr val="lt1"/>
+          </a:fontRef>
+        </p:style>
+        <p:txBody>
+          <a:bodyPr rtlCol="0" anchor="ctr"/>
+          <a:lstStyle/>
+          <a:p>
+            <a:pPr algn="ctr"/>
+          </a:p>
+        </p:txBody>
+      </p:sp>
+      <p:sp>
+        <p:nvSpPr>
+          <p:cNvPr id="11" name="TextBox 10"/>
+          <p:cNvSpPr txBox="1"/>
+          <p:nvPr/>
+        </p:nvSpPr>
+        <p:spPr>
+          <a:xfrm>
+            <a:off x="6629400" y="3680460"/>
+            <a:ext cx="4754879" cy="640080"/>
+          </a:xfrm>
+          <a:prstGeom prst="rect">
+            <a:avLst/>
+          </a:prstGeom>
+          <a:noFill/>
+        </p:spPr>
+        <p:txBody>
+          <a:bodyPr wrap="square" lIns="0" rIns="0" tIns="0" bIns="0">
+            <a:spAutoFit/>
+          </a:bodyPr>
+          <a:lstStyle/>
+          <a:p>
+            <a:pPr algn="ctr"/>
+            <a:r>
+              <a:rPr sz="1300" b="0">
+                <a:solidFill>
+                  <a:srgbClr val="767C87"/>
+                </a:solidFill>
+                <a:latin typeface="Noto Sans TC"/>
+              </a:rPr>
+              <a:t>（貼截圖：平台答＋本地紅框標出換算差）</a:t>
+            </a:r>
+          </a:p>
+        </p:txBody>
+      </p:sp>
+      <p:sp>
+        <p:nvSpPr>
+          <p:cNvPr id="12" name="TextBox 11"/>
+          <p:cNvSpPr txBox="1"/>
+          <p:nvPr/>
+        </p:nvSpPr>
+        <p:spPr>
+          <a:xfrm>
+            <a:off x="640080" y="5806440"/>
+            <a:ext cx="10972800" cy="457200"/>
+          </a:xfrm>
+          <a:prstGeom prst="rect">
+            <a:avLst/>
+          </a:prstGeom>
+          <a:noFill/>
+        </p:spPr>
+        <p:txBody>
+          <a:bodyPr wrap="square" lIns="0" rIns="0" tIns="0" bIns="0">
+            <a:spAutoFit/>
+          </a:bodyPr>
+          <a:lstStyle/>
+          <a:p>
+            <a:pPr algn="l"/>
+            <a:r>
+              <a:rPr sz="1300" b="1">
+                <a:solidFill>
+                  <a:srgbClr val="1E3A5F"/>
+                </a:solidFill>
+                <a:latin typeface="Noto Sans TC"/>
+              </a:rPr>
+              <a:t>重建圖譜後平台答對 132 億；平台若換算差 10 倍，本地紅框當場標出——EAP 為主、本地把關。</a:t>
             </a:r>
           </a:p>
         </p:txBody>
@@ -17561,7 +19049,7 @@
                 <a:ea typeface="Microsoft JhengHei"/>
                 <a:cs typeface="Microsoft JhengHei"/>
               </a:rPr>
-              <a:t>360</a:t>
+              <a:t>846</a:t>
             </a:r>
           </a:p>
         </p:txBody>
@@ -17655,7 +19143,7 @@
                 <a:ea typeface="Microsoft JhengHei"/>
                 <a:cs typeface="Microsoft JhengHei"/>
               </a:rPr>
-              <a:t>中信 · 國泰 · 玉山 · 第一金控——皆公開資料，最能凸顯「難以並排比較」的痛點；第一金控為上線後經網頁上傳新增，可持續擴充。</a:t>
+              <a:t>中信 · 國泰 · 玉山 · 第一金控——皆公開資料，最能凸顯「難以並排比較」的痛點；第一金控與三家 2025 年報均為上線後上傳新增，可持續擴充。</a:t>
             </a:r>
           </a:p>
         </p:txBody>
